--- a/Documents/Final Presentation.pptx
+++ b/Documents/Final Presentation.pptx
@@ -22,12 +22,26 @@
   <p:notesSz cx="8229600" cy="14630400"/>
   <p:embeddedFontLst>
     <p:embeddedFont>
+      <p:font typeface="Aharoni" panose="02010803020104030203" pitchFamily="2" charset="-79"/>
+      <p:bold r:id="rId12"/>
+    </p:embeddedFont>
+    <p:embeddedFont>
+      <p:font typeface="Calibri" panose="020F0502020204030204" pitchFamily="34" charset="0"/>
+      <p:regular r:id="rId13"/>
+      <p:bold r:id="rId14"/>
+      <p:italic r:id="rId15"/>
+      <p:boldItalic r:id="rId16"/>
+    </p:embeddedFont>
+    <p:embeddedFont>
       <p:font typeface="Fraunces Extra Bold" panose="020B0604020202020204" charset="0"/>
-      <p:regular r:id="rId12"/>
+      <p:regular r:id="rId17"/>
     </p:embeddedFont>
     <p:embeddedFont>
       <p:font typeface="Nobile" panose="020B0604020202020204" charset="0"/>
-      <p:regular r:id="rId13"/>
+      <p:regular r:id="rId18"/>
+      <p:bold r:id="rId19"/>
+      <p:italic r:id="rId20"/>
+      <p:boldItalic r:id="rId21"/>
     </p:embeddedFont>
   </p:embeddedFontLst>
   <p:defaultTextStyle>
@@ -1079,7 +1093,7 @@
           <a:p>
             <a:fld id="{1E4094D1-86A1-46A6-95C8-B21369F124B9}" type="datetimeFigureOut">
               <a:rPr lang="en-IL" smtClean="0"/>
-              <a:t>18/01/2026</a:t>
+              <a:t>01/18/2026</a:t>
             </a:fld>
             <a:endParaRPr lang="en-IL"/>
           </a:p>
@@ -1280,7 +1294,7 @@
           <a:p>
             <a:fld id="{1E4094D1-86A1-46A6-95C8-B21369F124B9}" type="datetimeFigureOut">
               <a:rPr lang="en-IL" smtClean="0"/>
-              <a:t>18/01/2026</a:t>
+              <a:t>01/18/2026</a:t>
             </a:fld>
             <a:endParaRPr lang="en-IL"/>
           </a:p>
@@ -1491,7 +1505,7 @@
           <a:p>
             <a:fld id="{1E4094D1-86A1-46A6-95C8-B21369F124B9}" type="datetimeFigureOut">
               <a:rPr lang="en-IL" smtClean="0"/>
-              <a:t>18/01/2026</a:t>
+              <a:t>01/18/2026</a:t>
             </a:fld>
             <a:endParaRPr lang="en-IL"/>
           </a:p>
@@ -1932,7 +1946,7 @@
           <a:p>
             <a:fld id="{1E4094D1-86A1-46A6-95C8-B21369F124B9}" type="datetimeFigureOut">
               <a:rPr lang="en-IL" smtClean="0"/>
-              <a:t>18/01/2026</a:t>
+              <a:t>01/18/2026</a:t>
             </a:fld>
             <a:endParaRPr lang="en-IL"/>
           </a:p>
@@ -2209,7 +2223,7 @@
           <a:p>
             <a:fld id="{1E4094D1-86A1-46A6-95C8-B21369F124B9}" type="datetimeFigureOut">
               <a:rPr lang="en-IL" smtClean="0"/>
-              <a:t>18/01/2026</a:t>
+              <a:t>01/18/2026</a:t>
             </a:fld>
             <a:endParaRPr lang="en-IL"/>
           </a:p>
@@ -2478,7 +2492,7 @@
           <a:p>
             <a:fld id="{1E4094D1-86A1-46A6-95C8-B21369F124B9}" type="datetimeFigureOut">
               <a:rPr lang="en-IL" smtClean="0"/>
-              <a:t>18/01/2026</a:t>
+              <a:t>01/18/2026</a:t>
             </a:fld>
             <a:endParaRPr lang="en-IL"/>
           </a:p>
@@ -2894,7 +2908,7 @@
           <a:p>
             <a:fld id="{1E4094D1-86A1-46A6-95C8-B21369F124B9}" type="datetimeFigureOut">
               <a:rPr lang="en-IL" smtClean="0"/>
-              <a:t>18/01/2026</a:t>
+              <a:t>01/18/2026</a:t>
             </a:fld>
             <a:endParaRPr lang="en-IL"/>
           </a:p>
@@ -3037,7 +3051,7 @@
           <a:p>
             <a:fld id="{1E4094D1-86A1-46A6-95C8-B21369F124B9}" type="datetimeFigureOut">
               <a:rPr lang="en-IL" smtClean="0"/>
-              <a:t>18/01/2026</a:t>
+              <a:t>01/18/2026</a:t>
             </a:fld>
             <a:endParaRPr lang="en-IL"/>
           </a:p>
@@ -3151,7 +3165,7 @@
           <a:p>
             <a:fld id="{1E4094D1-86A1-46A6-95C8-B21369F124B9}" type="datetimeFigureOut">
               <a:rPr lang="en-IL" smtClean="0"/>
-              <a:t>18/01/2026</a:t>
+              <a:t>01/18/2026</a:t>
             </a:fld>
             <a:endParaRPr lang="en-IL"/>
           </a:p>
@@ -3465,7 +3479,7 @@
           <a:p>
             <a:fld id="{1E4094D1-86A1-46A6-95C8-B21369F124B9}" type="datetimeFigureOut">
               <a:rPr lang="en-IL" smtClean="0"/>
-              <a:t>18/01/2026</a:t>
+              <a:t>01/18/2026</a:t>
             </a:fld>
             <a:endParaRPr lang="en-IL"/>
           </a:p>
@@ -3755,7 +3769,7 @@
           <a:p>
             <a:fld id="{1E4094D1-86A1-46A6-95C8-B21369F124B9}" type="datetimeFigureOut">
               <a:rPr lang="en-IL" smtClean="0"/>
-              <a:t>18/01/2026</a:t>
+              <a:t>01/18/2026</a:t>
             </a:fld>
             <a:endParaRPr lang="en-IL"/>
           </a:p>
@@ -4004,7 +4018,7 @@
           <a:p>
             <a:fld id="{1E4094D1-86A1-46A6-95C8-B21369F124B9}" type="datetimeFigureOut">
               <a:rPr lang="en-IL" smtClean="0"/>
-              <a:t>18/01/2026</a:t>
+              <a:t>01/18/2026</a:t>
             </a:fld>
             <a:endParaRPr lang="en-IL"/>
           </a:p>
@@ -5764,67 +5778,146 @@
           <a:chExt cx="0" cy="0"/>
         </a:xfrm>
       </p:grpSpPr>
-      <p:sp>
-        <p:nvSpPr>
-          <p:cNvPr id="2" name="Text 0"/>
-          <p:cNvSpPr/>
-          <p:nvPr/>
-        </p:nvSpPr>
-        <p:spPr>
-          <a:xfrm>
-            <a:off x="891183" y="741283"/>
-            <a:ext cx="12847915" cy="324922"/>
-          </a:xfrm>
-          <a:prstGeom prst="rect">
-            <a:avLst/>
-          </a:prstGeom>
-          <a:noFill/>
-          <a:ln/>
-        </p:spPr>
-        <p:txBody>
-          <a:bodyPr wrap="none" lIns="0" tIns="0" rIns="0" bIns="0" rtlCol="0" anchor="t"/>
-          <a:lstStyle/>
-          <a:p>
-            <a:pPr marL="0" indent="0" algn="l">
-              <a:lnSpc>
-                <a:spcPts val="2550"/>
-              </a:lnSpc>
-              <a:buNone/>
-            </a:pPr>
-            <a:endParaRPr lang="en-US" sz="1550" dirty="0"/>
-          </a:p>
-        </p:txBody>
-      </p:sp>
-      <p:pic>
-        <p:nvPicPr>
-          <p:cNvPr id="6" name="Picture 5">
+      <p:grpSp>
+        <p:nvGrpSpPr>
+          <p:cNvPr id="3" name="Group 2">
             <a:extLst>
               <a:ext uri="{FF2B5EF4-FFF2-40B4-BE49-F238E27FC236}">
-                <a16:creationId xmlns:a16="http://schemas.microsoft.com/office/drawing/2014/main" id="{26F75869-3033-C15D-034D-A97CAB493F13}"/>
+                <a16:creationId xmlns:a16="http://schemas.microsoft.com/office/drawing/2014/main" id="{7B8B1A18-3B98-4EAD-BC99-4A83E184B023}"/>
               </a:ext>
             </a:extLst>
           </p:cNvPr>
-          <p:cNvPicPr>
-            <a:picLocks noChangeAspect="1"/>
-          </p:cNvPicPr>
-          <p:nvPr/>
-        </p:nvPicPr>
-        <p:blipFill>
-          <a:blip r:embed="rId3"/>
-          <a:stretch>
-            <a:fillRect/>
-          </a:stretch>
-        </p:blipFill>
-        <p:spPr>
-          <a:xfrm>
-            <a:off x="0" y="34071"/>
-            <a:ext cx="14630400" cy="8161458"/>
-          </a:xfrm>
-          <a:prstGeom prst="rect">
-            <a:avLst/>
-          </a:prstGeom>
-        </p:spPr>
-      </p:pic>
+          <p:cNvGrpSpPr/>
+          <p:nvPr/>
+        </p:nvGrpSpPr>
+        <p:grpSpPr>
+          <a:xfrm>
+            <a:off x="891183" y="565594"/>
+            <a:ext cx="13003174" cy="7098412"/>
+            <a:chOff x="891183" y="565594"/>
+            <a:chExt cx="13003174" cy="7098412"/>
+          </a:xfrm>
+        </p:grpSpPr>
+        <p:sp>
+          <p:nvSpPr>
+            <p:cNvPr id="2" name="Text 0"/>
+            <p:cNvSpPr/>
+            <p:nvPr/>
+          </p:nvSpPr>
+          <p:spPr>
+            <a:xfrm>
+              <a:off x="891183" y="741283"/>
+              <a:ext cx="12847915" cy="324922"/>
+            </a:xfrm>
+            <a:prstGeom prst="rect">
+              <a:avLst/>
+            </a:prstGeom>
+            <a:noFill/>
+            <a:ln/>
+          </p:spPr>
+          <p:txBody>
+            <a:bodyPr wrap="none" lIns="0" tIns="0" rIns="0" bIns="0" rtlCol="0" anchor="t"/>
+            <a:lstStyle/>
+            <a:p>
+              <a:pPr marL="0" indent="0" algn="l">
+                <a:lnSpc>
+                  <a:spcPts val="2550"/>
+                </a:lnSpc>
+                <a:buNone/>
+              </a:pPr>
+              <a:endParaRPr lang="en-US" sz="1550" dirty="0"/>
+            </a:p>
+          </p:txBody>
+        </p:sp>
+        <p:pic>
+          <p:nvPicPr>
+            <p:cNvPr id="7" name="Picture 6">
+              <a:extLst>
+                <a:ext uri="{FF2B5EF4-FFF2-40B4-BE49-F238E27FC236}">
+                  <a16:creationId xmlns:a16="http://schemas.microsoft.com/office/drawing/2014/main" id="{7528536D-DFB0-FA18-5964-C5B35636DA0E}"/>
+                </a:ext>
+              </a:extLst>
+            </p:cNvPr>
+            <p:cNvPicPr>
+              <a:picLocks noChangeAspect="1"/>
+            </p:cNvPicPr>
+            <p:nvPr/>
+          </p:nvPicPr>
+          <p:blipFill>
+            <a:blip r:embed="rId3"/>
+            <a:stretch>
+              <a:fillRect/>
+            </a:stretch>
+          </p:blipFill>
+          <p:spPr>
+            <a:xfrm>
+              <a:off x="891183" y="565594"/>
+              <a:ext cx="13003174" cy="7098412"/>
+            </a:xfrm>
+            <a:prstGeom prst="rect">
+              <a:avLst/>
+            </a:prstGeom>
+          </p:spPr>
+        </p:pic>
+        <p:pic>
+          <p:nvPicPr>
+            <p:cNvPr id="4" name="Picture 3">
+              <a:extLst>
+                <a:ext uri="{FF2B5EF4-FFF2-40B4-BE49-F238E27FC236}">
+                  <a16:creationId xmlns:a16="http://schemas.microsoft.com/office/drawing/2014/main" id="{D877E7C9-3EFB-4F79-8DBC-258B812F36F3}"/>
+                </a:ext>
+              </a:extLst>
+            </p:cNvPr>
+            <p:cNvPicPr>
+              <a:picLocks noChangeAspect="1"/>
+            </p:cNvPicPr>
+            <p:nvPr/>
+          </p:nvPicPr>
+          <p:blipFill rotWithShape="1">
+            <a:blip r:embed="rId3"/>
+            <a:srcRect l="66331" t="59125" r="2597" b="5675"/>
+            <a:stretch/>
+          </p:blipFill>
+          <p:spPr>
+            <a:xfrm>
+              <a:off x="9511085" y="2364295"/>
+              <a:ext cx="4040372" cy="2498651"/>
+            </a:xfrm>
+            <a:prstGeom prst="rect">
+              <a:avLst/>
+            </a:prstGeom>
+          </p:spPr>
+        </p:pic>
+        <p:pic>
+          <p:nvPicPr>
+            <p:cNvPr id="5" name="Picture 4">
+              <a:extLst>
+                <a:ext uri="{FF2B5EF4-FFF2-40B4-BE49-F238E27FC236}">
+                  <a16:creationId xmlns:a16="http://schemas.microsoft.com/office/drawing/2014/main" id="{86A62241-AC5F-41BA-909B-9C34BAA49ADD}"/>
+                </a:ext>
+              </a:extLst>
+            </p:cNvPr>
+            <p:cNvPicPr>
+              <a:picLocks noChangeAspect="1"/>
+            </p:cNvPicPr>
+            <p:nvPr/>
+          </p:nvPicPr>
+          <p:blipFill rotWithShape="1">
+            <a:blip r:embed="rId3"/>
+            <a:srcRect l="66292" t="26008" r="2370" b="40031"/>
+            <a:stretch/>
+          </p:blipFill>
+          <p:spPr>
+            <a:xfrm>
+              <a:off x="9476509" y="4862946"/>
+              <a:ext cx="4074948" cy="2410691"/>
+            </a:xfrm>
+            <a:prstGeom prst="rect">
+              <a:avLst/>
+            </a:prstGeom>
+          </p:spPr>
+        </p:pic>
+      </p:grpSp>
     </p:spTree>
   </p:cSld>
   <p:clrMapOvr>
@@ -7568,7 +7661,7 @@
           <p:nvPr>
             <p:extLst>
               <p:ext uri="{D42A27DB-BD31-4B8C-83A1-F6EECF244321}">
-                <p14:modId xmlns:p14="http://schemas.microsoft.com/office/powerpoint/2010/main" val="803054369"/>
+                <p14:modId xmlns:p14="http://schemas.microsoft.com/office/powerpoint/2010/main" val="2115555723"/>
               </p:ext>
             </p:extLst>
           </p:nvPr>
@@ -8583,7 +8676,7 @@
         </p:blipFill>
         <p:spPr>
           <a:xfrm>
-            <a:off x="400690" y="6972821"/>
+            <a:off x="410964" y="6972821"/>
             <a:ext cx="559942" cy="559942"/>
           </a:xfrm>
           <a:prstGeom prst="rect">
@@ -8830,182 +8923,6 @@
           </a:p>
         </p:txBody>
       </p:sp>
-      <p:pic>
-        <p:nvPicPr>
-          <p:cNvPr id="3" name="Image 0" descr="preencoded.png"/>
-          <p:cNvPicPr>
-            <a:picLocks noChangeAspect="1"/>
-          </p:cNvPicPr>
-          <p:nvPr/>
-        </p:nvPicPr>
-        <p:blipFill>
-          <a:blip r:embed="rId3">
-            <a:extLst>
-              <a:ext uri="{96DAC541-7B7A-43D3-8B79-37D633B846F1}">
-                <asvg:svgBlip xmlns:asvg="http://schemas.microsoft.com/office/drawing/2016/SVG/main" r:embed="rId4"/>
-              </a:ext>
-            </a:extLst>
-          </a:blip>
-          <a:stretch>
-            <a:fillRect/>
-          </a:stretch>
-        </p:blipFill>
-        <p:spPr>
-          <a:xfrm>
-            <a:off x="213231" y="210681"/>
-            <a:ext cx="135017" cy="135017"/>
-          </a:xfrm>
-          <a:prstGeom prst="rect">
-            <a:avLst/>
-          </a:prstGeom>
-        </p:spPr>
-      </p:pic>
-      <p:sp>
-        <p:nvSpPr>
-          <p:cNvPr id="4" name="Text 1"/>
-          <p:cNvSpPr/>
-          <p:nvPr/>
-        </p:nvSpPr>
-        <p:spPr>
-          <a:xfrm>
-            <a:off x="415756" y="170080"/>
-            <a:ext cx="1012269" cy="216218"/>
-          </a:xfrm>
-          <a:prstGeom prst="rect">
-            <a:avLst/>
-          </a:prstGeom>
-          <a:noFill/>
-          <a:ln/>
-        </p:spPr>
-        <p:txBody>
-          <a:bodyPr wrap="none" lIns="0" tIns="0" rIns="0" bIns="0" rtlCol="0" anchor="t"/>
-          <a:lstStyle/>
-          <a:p>
-            <a:pPr marL="0" indent="0" algn="l">
-              <a:lnSpc>
-                <a:spcPts val="1700"/>
-              </a:lnSpc>
-              <a:buNone/>
-            </a:pPr>
-            <a:r>
-              <a:rPr lang="en-US" sz="1200" dirty="0">
-                <a:solidFill>
-                  <a:srgbClr val="405449"/>
-                </a:solidFill>
-                <a:ea typeface="Nobile" pitchFamily="34" charset="-122"/>
-                <a:cs typeface="Nobile" pitchFamily="34" charset="-120"/>
-              </a:rPr>
-              <a:t>PERFORMANCE</a:t>
-            </a:r>
-            <a:endParaRPr lang="en-US" sz="1200" dirty="0"/>
-          </a:p>
-        </p:txBody>
-      </p:sp>
-      <p:sp>
-        <p:nvSpPr>
-          <p:cNvPr id="5" name="Text 2"/>
-          <p:cNvSpPr/>
-          <p:nvPr/>
-        </p:nvSpPr>
-        <p:spPr>
-          <a:xfrm>
-            <a:off x="744683" y="515594"/>
-            <a:ext cx="7463076" cy="527685"/>
-          </a:xfrm>
-          <a:prstGeom prst="rect">
-            <a:avLst/>
-          </a:prstGeom>
-          <a:noFill/>
-          <a:ln/>
-        </p:spPr>
-        <p:txBody>
-          <a:bodyPr wrap="none" lIns="0" tIns="0" rIns="0" bIns="0" rtlCol="0" anchor="t"/>
-          <a:lstStyle/>
-          <a:p>
-            <a:pPr>
-              <a:lnSpc>
-                <a:spcPts val="4150"/>
-              </a:lnSpc>
-            </a:pPr>
-            <a:r>
-              <a:rPr lang="en-US" sz="4000" b="1" dirty="0">
-                <a:solidFill>
-                  <a:srgbClr val="3B4540"/>
-                </a:solidFill>
-                <a:ea typeface="Fraunces Extra Bold" pitchFamily="34" charset="-122"/>
-                <a:cs typeface="Fraunces Extra Bold" pitchFamily="34" charset="-120"/>
-              </a:rPr>
-              <a:t>Results: Seen vs. Unseen Context</a:t>
-            </a:r>
-            <a:endParaRPr lang="en-US" sz="4000" dirty="0"/>
-          </a:p>
-        </p:txBody>
-      </p:sp>
-      <p:sp>
-        <p:nvSpPr>
-          <p:cNvPr id="7" name="Text 4"/>
-          <p:cNvSpPr/>
-          <p:nvPr/>
-        </p:nvSpPr>
-        <p:spPr>
-          <a:xfrm>
-            <a:off x="1596737" y="1014208"/>
-            <a:ext cx="4584144" cy="316468"/>
-          </a:xfrm>
-          <a:prstGeom prst="rect">
-            <a:avLst/>
-          </a:prstGeom>
-          <a:noFill/>
-          <a:ln/>
-        </p:spPr>
-        <p:txBody>
-          <a:bodyPr wrap="none" lIns="0" tIns="0" rIns="0" bIns="0" rtlCol="0" anchor="t"/>
-          <a:lstStyle/>
-          <a:p>
-            <a:pPr marL="0" indent="0" algn="l">
-              <a:lnSpc>
-                <a:spcPts val="2450"/>
-              </a:lnSpc>
-              <a:buNone/>
-            </a:pPr>
-            <a:r>
-              <a:rPr lang="en-US" sz="2400" b="1" dirty="0">
-                <a:solidFill>
-                  <a:srgbClr val="3B4540"/>
-                </a:solidFill>
-                <a:ea typeface="Fraunces Extra Bold" pitchFamily="34" charset="-122"/>
-                <a:cs typeface="Fraunces Extra Bold" pitchFamily="34" charset="-120"/>
-              </a:rPr>
-              <a:t>Component Classification Accuracy</a:t>
-            </a:r>
-            <a:endParaRPr lang="en-US" sz="2400" dirty="0"/>
-          </a:p>
-        </p:txBody>
-      </p:sp>
-      <p:pic>
-        <p:nvPicPr>
-          <p:cNvPr id="8" name="Image 1" descr="preencoded.png"/>
-          <p:cNvPicPr>
-            <a:picLocks noChangeAspect="1"/>
-          </p:cNvPicPr>
-          <p:nvPr/>
-        </p:nvPicPr>
-        <p:blipFill>
-          <a:blip r:embed="rId5"/>
-          <a:stretch>
-            <a:fillRect/>
-          </a:stretch>
-        </p:blipFill>
-        <p:spPr>
-          <a:xfrm>
-            <a:off x="969888" y="1433826"/>
-            <a:ext cx="12394576" cy="4604234"/>
-          </a:xfrm>
-          <a:prstGeom prst="rect">
-            <a:avLst/>
-          </a:prstGeom>
-        </p:spPr>
-      </p:pic>
       <p:sp>
         <p:nvSpPr>
           <p:cNvPr id="9" name="Shape 5"/>
@@ -9014,7 +8931,7 @@
         </p:nvSpPr>
         <p:spPr>
           <a:xfrm>
-            <a:off x="1246265" y="6244361"/>
+            <a:off x="1296582" y="6362505"/>
             <a:ext cx="11010236" cy="1643216"/>
           </a:xfrm>
           <a:prstGeom prst="roundRect">
@@ -9048,7 +8965,7 @@
         </p:nvSpPr>
         <p:spPr>
           <a:xfrm>
-            <a:off x="1435855" y="6362505"/>
+            <a:off x="1486172" y="6480649"/>
             <a:ext cx="10813025" cy="542092"/>
           </a:xfrm>
           <a:prstGeom prst="rect">
@@ -9077,7 +8994,7 @@
         </p:nvSpPr>
         <p:spPr>
           <a:xfrm>
-            <a:off x="1719959" y="6495611"/>
+            <a:off x="1770276" y="6613755"/>
             <a:ext cx="2357065" cy="300163"/>
           </a:xfrm>
           <a:prstGeom prst="rect">
@@ -9118,7 +9035,7 @@
         </p:nvSpPr>
         <p:spPr>
           <a:xfrm>
-            <a:off x="4397598" y="6495611"/>
+            <a:off x="4447915" y="6613755"/>
             <a:ext cx="1812552" cy="300163"/>
           </a:xfrm>
           <a:prstGeom prst="rect">
@@ -9159,7 +9076,7 @@
         </p:nvSpPr>
         <p:spPr>
           <a:xfrm>
-            <a:off x="6530722" y="6495611"/>
+            <a:off x="6581039" y="6613755"/>
             <a:ext cx="1812552" cy="300163"/>
           </a:xfrm>
           <a:prstGeom prst="rect">
@@ -9200,7 +9117,7 @@
         </p:nvSpPr>
         <p:spPr>
           <a:xfrm>
-            <a:off x="8663845" y="6495611"/>
+            <a:off x="8714162" y="6613755"/>
             <a:ext cx="1812552" cy="300163"/>
           </a:xfrm>
           <a:prstGeom prst="rect">
@@ -9241,7 +9158,7 @@
         </p:nvSpPr>
         <p:spPr>
           <a:xfrm>
-            <a:off x="10804285" y="6495611"/>
+            <a:off x="10854602" y="6613755"/>
             <a:ext cx="1275764" cy="300163"/>
           </a:xfrm>
           <a:prstGeom prst="rect">
@@ -9282,7 +9199,7 @@
         </p:nvSpPr>
         <p:spPr>
           <a:xfrm>
-            <a:off x="1435855" y="6850185"/>
+            <a:off x="1486172" y="6968329"/>
             <a:ext cx="10813025" cy="542092"/>
           </a:xfrm>
           <a:prstGeom prst="rect">
@@ -9311,7 +9228,7 @@
         </p:nvSpPr>
         <p:spPr>
           <a:xfrm>
-            <a:off x="1719959" y="6983291"/>
+            <a:off x="1770276" y="7101435"/>
             <a:ext cx="2357065" cy="300163"/>
           </a:xfrm>
           <a:prstGeom prst="rect">
@@ -9352,7 +9269,7 @@
         </p:nvSpPr>
         <p:spPr>
           <a:xfrm>
-            <a:off x="4397598" y="6983291"/>
+            <a:off x="4447915" y="7101435"/>
             <a:ext cx="1812552" cy="300163"/>
           </a:xfrm>
           <a:prstGeom prst="rect">
@@ -9393,7 +9310,7 @@
         </p:nvSpPr>
         <p:spPr>
           <a:xfrm>
-            <a:off x="6530722" y="6983291"/>
+            <a:off x="6581039" y="7101435"/>
             <a:ext cx="1812552" cy="300163"/>
           </a:xfrm>
           <a:prstGeom prst="rect">
@@ -9434,7 +9351,7 @@
         </p:nvSpPr>
         <p:spPr>
           <a:xfrm>
-            <a:off x="8663845" y="6983291"/>
+            <a:off x="8714162" y="7101435"/>
             <a:ext cx="1812552" cy="300163"/>
           </a:xfrm>
           <a:prstGeom prst="rect">
@@ -9472,7 +9389,7 @@
         </p:nvSpPr>
         <p:spPr>
           <a:xfrm>
-            <a:off x="10804285" y="6983291"/>
+            <a:off x="10854602" y="7101435"/>
             <a:ext cx="1275764" cy="300163"/>
           </a:xfrm>
           <a:prstGeom prst="rect">
@@ -9547,7 +9464,7 @@
         </p:nvSpPr>
         <p:spPr>
           <a:xfrm>
-            <a:off x="1435855" y="7337865"/>
+            <a:off x="1486172" y="7456009"/>
             <a:ext cx="10813025" cy="542092"/>
           </a:xfrm>
           <a:prstGeom prst="rect">
@@ -9576,7 +9493,7 @@
         </p:nvSpPr>
         <p:spPr>
           <a:xfrm>
-            <a:off x="1719959" y="7470971"/>
+            <a:off x="1770276" y="7589115"/>
             <a:ext cx="2357065" cy="300163"/>
           </a:xfrm>
           <a:prstGeom prst="rect">
@@ -9617,7 +9534,7 @@
         </p:nvSpPr>
         <p:spPr>
           <a:xfrm>
-            <a:off x="4397598" y="7470971"/>
+            <a:off x="4447915" y="7589115"/>
             <a:ext cx="1812552" cy="300163"/>
           </a:xfrm>
           <a:prstGeom prst="rect">
@@ -9658,7 +9575,7 @@
         </p:nvSpPr>
         <p:spPr>
           <a:xfrm>
-            <a:off x="6530722" y="7470971"/>
+            <a:off x="6581039" y="7589115"/>
             <a:ext cx="1812552" cy="300163"/>
           </a:xfrm>
           <a:prstGeom prst="rect">
@@ -9699,7 +9616,7 @@
         </p:nvSpPr>
         <p:spPr>
           <a:xfrm>
-            <a:off x="8663845" y="7470971"/>
+            <a:off x="8714162" y="7589115"/>
             <a:ext cx="1812552" cy="300163"/>
           </a:xfrm>
           <a:prstGeom prst="rect">
@@ -9737,7 +9654,7 @@
         </p:nvSpPr>
         <p:spPr>
           <a:xfrm>
-            <a:off x="10804285" y="7470971"/>
+            <a:off x="10854602" y="7589115"/>
             <a:ext cx="1275764" cy="300163"/>
           </a:xfrm>
           <a:prstGeom prst="rect">
@@ -9804,6 +9721,35 @@
           </a:p>
         </p:txBody>
       </p:sp>
+      <p:pic>
+        <p:nvPicPr>
+          <p:cNvPr id="6" name="Picture 5">
+            <a:extLst>
+              <a:ext uri="{FF2B5EF4-FFF2-40B4-BE49-F238E27FC236}">
+                <a16:creationId xmlns:a16="http://schemas.microsoft.com/office/drawing/2014/main" id="{DF7C77E6-2AAE-4906-8B42-46673EA9A22E}"/>
+              </a:ext>
+            </a:extLst>
+          </p:cNvPr>
+          <p:cNvPicPr>
+            <a:picLocks noChangeAspect="1"/>
+          </p:cNvPicPr>
+          <p:nvPr/>
+        </p:nvPicPr>
+        <p:blipFill rotWithShape="1">
+          <a:blip r:embed="rId3"/>
+          <a:srcRect l="-170" t="261" r="3419" b="24361"/>
+          <a:stretch/>
+        </p:blipFill>
+        <p:spPr>
+          <a:xfrm>
+            <a:off x="0" y="20253"/>
+            <a:ext cx="14501976" cy="6342252"/>
+          </a:xfrm>
+          <a:prstGeom prst="rect">
+            <a:avLst/>
+          </a:prstGeom>
+        </p:spPr>
+      </p:pic>
     </p:spTree>
   </p:cSld>
   <p:clrMapOvr>
